--- a/videos/deep-learning/002_transformers_part2/recreated_pptx/slide_018_recreated.pptx
+++ b/videos/deep-learning/002_transformers_part2/recreated_pptx/slide_018_recreated.pptx
@@ -988,9 +988,9 @@
             <a:prstDash val="solid"/>
           </a:ln>
           <a:effectLst>
-            <a:outerShdw sx="100000" sy="100000" kx="0" ky="0" algn="bl" rotWithShape="0" blurRad="63500" dist="25400" dir="5400000">
+            <a:outerShdw sx="100000" sy="100000" kx="0" ky="0" algn="bl" rotWithShape="0" blurRad="38100" dist="25400" dir="5400000">
               <a:srgbClr val="000000">
-                <a:alpha val="25000"/>
+                <a:alpha val="5000"/>
               </a:srgbClr>
             </a:outerShdw>
           </a:effectLst>
@@ -1004,8 +1004,8 @@
         </p:nvSpPr>
         <p:spPr>
           <a:xfrm>
-            <a:off x="552450" y="2540508"/>
-            <a:ext cx="10972800" cy="812800"/>
+            <a:off x="581660" y="2545501"/>
+            <a:ext cx="10972800" cy="804672"/>
           </a:xfrm>
           <a:prstGeom prst="rect">
             <a:avLst/>
@@ -1021,7 +1021,7 @@
               <a:buNone/>
             </a:pPr>
             <a:r>
-              <a:rPr lang="en-US" sz="4000" b="1" dirty="0">
+              <a:rPr lang="en-US" sz="3960" b="1" dirty="0">
                 <a:solidFill>
                   <a:srgbClr val="CC0000"/>
                 </a:solidFill>
@@ -1031,7 +1031,7 @@
               </a:rPr>
               <a:t>Adding Position Information</a:t>
             </a:r>
-            <a:endParaRPr lang="en-US" sz="4000" dirty="0"/>
+            <a:endParaRPr lang="en-US" sz="3960" dirty="0"/>
           </a:p>
         </p:txBody>
       </p:sp>
@@ -1043,8 +1043,8 @@
         </p:nvSpPr>
         <p:spPr>
           <a:xfrm>
-            <a:off x="3347085" y="3943858"/>
-            <a:ext cx="5334000" cy="609600"/>
+            <a:off x="3342513" y="3942316"/>
+            <a:ext cx="5334000" cy="631952"/>
           </a:xfrm>
           <a:prstGeom prst="rect">
             <a:avLst/>
@@ -1060,7 +1060,7 @@
               <a:buNone/>
             </a:pPr>
             <a:r>
-              <a:rPr lang="en-US" sz="3000" b="1" dirty="0">
+              <a:rPr lang="en-US" sz="3110" b="1" spc="15" kern="0" dirty="0">
                 <a:solidFill>
                   <a:srgbClr val="0000A0"/>
                 </a:solidFill>
@@ -1074,7 +1074,7 @@
               <a:buNone/>
             </a:pPr>
             <a:r>
-              <a:rPr lang="en-US" sz="3000" b="1" dirty="0">
+              <a:rPr lang="en-US" sz="3110" b="1" dirty="0">
                 <a:solidFill>
                   <a:srgbClr val="CC0000"/>
                 </a:solidFill>
@@ -1084,7 +1084,7 @@
               </a:rPr>
               <a:t>Encoding</a:t>
             </a:r>
-            <a:endParaRPr lang="en-US" sz="3000" dirty="0"/>
+            <a:endParaRPr lang="en-US" sz="3110" dirty="0"/>
           </a:p>
         </p:txBody>
       </p:sp>
@@ -1096,8 +1096,8 @@
         </p:nvSpPr>
         <p:spPr>
           <a:xfrm>
-            <a:off x="3347085" y="4820412"/>
-            <a:ext cx="5334000" cy="609600"/>
+            <a:off x="3342513" y="4818870"/>
+            <a:ext cx="5334000" cy="631952"/>
           </a:xfrm>
           <a:prstGeom prst="rect">
             <a:avLst/>
@@ -1113,7 +1113,7 @@
               <a:buNone/>
             </a:pPr>
             <a:r>
-              <a:rPr lang="en-US" sz="3000" b="1" dirty="0">
+              <a:rPr lang="en-US" sz="3110" b="1" spc="15" kern="0" dirty="0">
                 <a:solidFill>
                   <a:srgbClr val="0000A0"/>
                 </a:solidFill>
@@ -1127,7 +1127,7 @@
               <a:buNone/>
             </a:pPr>
             <a:r>
-              <a:rPr lang="en-US" sz="3000" b="1" dirty="0">
+              <a:rPr lang="en-US" sz="3110" b="1" dirty="0">
                 <a:solidFill>
                   <a:srgbClr val="CC00CC"/>
                 </a:solidFill>
@@ -1137,7 +1137,7 @@
               </a:rPr>
               <a:t>Embedding</a:t>
             </a:r>
-            <a:endParaRPr lang="en-US" sz="3000" dirty="0"/>
+            <a:endParaRPr lang="en-US" sz="3110" dirty="0"/>
           </a:p>
         </p:txBody>
       </p:sp>
